--- a/docs/【课件模板】Python大课堂-课题名称.pptx
+++ b/docs/【课件模板】Python大课堂-课题名称.pptx
@@ -5,22 +5,22 @@
     <p:sldMasterId id="2147483648" r:id="rId1"/>
   </p:sldMasterIdLst>
   <p:notesMasterIdLst>
-    <p:notesMasterId r:id="rId8"/>
+    <p:notesMasterId r:id="rId7"/>
   </p:notesMasterIdLst>
   <p:handoutMasterIdLst>
-    <p:handoutMasterId r:id="rId9"/>
+    <p:handoutMasterId r:id="rId8"/>
   </p:handoutMasterIdLst>
   <p:sldIdLst>
-    <p:sldId id="266" r:id="rId3"/>
-    <p:sldId id="261" r:id="rId4"/>
-    <p:sldId id="264" r:id="rId5"/>
-    <p:sldId id="262" r:id="rId6"/>
-    <p:sldId id="267" r:id="rId7"/>
+    <p:sldId id="266" r:id="rId2"/>
+    <p:sldId id="261" r:id="rId3"/>
+    <p:sldId id="264" r:id="rId4"/>
+    <p:sldId id="262" r:id="rId5"/>
+    <p:sldId id="267" r:id="rId6"/>
   </p:sldIdLst>
   <p:sldSz cx="12192000" cy="6858000"/>
-  <p:notesSz cx="7103745" cy="10234295"/>
+  <p:notesSz cx="7104063" cy="10234613"/>
   <p:custDataLst>
-    <p:tags r:id="rId13"/>
+    <p:tags r:id="rId9"/>
   </p:custDataLst>
   <p:defaultTextStyle>
     <a:defPPr>
@@ -117,6 +117,11 @@
       </a:defRPr>
     </a:lvl9pPr>
   </p:defaultTextStyle>
+  <p:extLst>
+    <p:ext uri="{EFAFB233-063F-42B5-8137-9DF3F51BA10A}">
+      <p15:sldGuideLst xmlns:p15="http://schemas.microsoft.com/office/powerpoint/2012/main"/>
+    </p:ext>
+  </p:extLst>
 </p:presentation>
 </file>
 
@@ -202,6 +207,7 @@
           <a:p>
             <a:fld id="{0F9B84EA-7D68-4D60-9CB1-D50884785D1C}" type="datetimeFigureOut">
               <a:rPr lang="zh-CN" altLang="en-US" smtClean="0"/>
+              <a:t>2026/9/15</a:t>
             </a:fld>
             <a:endParaRPr lang="zh-CN" altLang="en-US"/>
           </a:p>
@@ -267,12 +273,18 @@
           <a:p>
             <a:fld id="{8D4E0FC9-F1F8-4FAE-9988-3BA365CFD46F}" type="slidenum">
               <a:rPr lang="zh-CN" altLang="en-US" smtClean="0"/>
+              <a:t>‹#›</a:t>
             </a:fld>
             <a:endParaRPr lang="zh-CN" altLang="en-US"/>
           </a:p>
         </p:txBody>
       </p:sp>
     </p:spTree>
+    <p:extLst>
+      <p:ext uri="{BB962C8B-B14F-4D97-AF65-F5344CB8AC3E}">
+        <p14:creationId xmlns:p14="http://schemas.microsoft.com/office/powerpoint/2010/main" val="1"/>
+      </p:ext>
+    </p:extLst>
   </p:cSld>
   <p:clrMap bg1="lt1" tx1="dk1" bg2="lt2" tx2="dk2" accent1="accent1" accent2="accent2" accent3="accent3" accent4="accent4" accent5="accent5" accent6="accent6" hlink="hlink" folHlink="folHlink"/>
 </p:handoutMaster>
@@ -360,6 +372,7 @@
           <a:p>
             <a:fld id="{C798B2B1-EF87-436F-BEC6-21DF84915C76}" type="datetimeFigureOut">
               <a:rPr lang="zh-CN" altLang="en-US" smtClean="0"/>
+              <a:t>2026/9/15</a:t>
             </a:fld>
             <a:endParaRPr lang="zh-CN" altLang="en-US"/>
           </a:p>
@@ -426,7 +439,6 @@
               <a:rPr lang="zh-CN" altLang="en-US"/>
               <a:t>单击此处编辑母版文本样式</a:t>
             </a:r>
-            <a:endParaRPr lang="zh-CN" altLang="en-US"/>
           </a:p>
           <a:p>
             <a:pPr lvl="1"/>
@@ -434,7 +446,6 @@
               <a:rPr lang="zh-CN" altLang="en-US"/>
               <a:t>第二级</a:t>
             </a:r>
-            <a:endParaRPr lang="zh-CN" altLang="en-US"/>
           </a:p>
           <a:p>
             <a:pPr lvl="2"/>
@@ -442,7 +453,6 @@
               <a:rPr lang="zh-CN" altLang="en-US"/>
               <a:t>第三级</a:t>
             </a:r>
-            <a:endParaRPr lang="zh-CN" altLang="en-US"/>
           </a:p>
           <a:p>
             <a:pPr lvl="3"/>
@@ -450,7 +460,6 @@
               <a:rPr lang="zh-CN" altLang="en-US"/>
               <a:t>第四级</a:t>
             </a:r>
-            <a:endParaRPr lang="zh-CN" altLang="en-US"/>
           </a:p>
           <a:p>
             <a:pPr lvl="4"/>
@@ -458,7 +467,6 @@
               <a:rPr lang="zh-CN" altLang="en-US"/>
               <a:t>第五级</a:t>
             </a:r>
-            <a:endParaRPr lang="zh-CN" altLang="en-US"/>
           </a:p>
         </p:txBody>
       </p:sp>
@@ -522,6 +530,7 @@
           <a:p>
             <a:fld id="{C914C15F-9ACF-400F-A090-EE9CC9157E75}" type="slidenum">
               <a:rPr lang="zh-CN" altLang="en-US" smtClean="0"/>
+              <a:t>‹#›</a:t>
             </a:fld>
             <a:endParaRPr lang="zh-CN" altLang="en-US"/>
           </a:p>
@@ -670,7 +679,6 @@
               <a:rPr lang="zh-CN" altLang="en-US"/>
               <a:t>单击此处编辑母版标题样式</a:t>
             </a:r>
-            <a:endParaRPr lang="zh-CN" altLang="en-US"/>
           </a:p>
         </p:txBody>
       </p:sp>
@@ -735,7 +743,6 @@
               <a:rPr lang="zh-CN" altLang="en-US"/>
               <a:t>单击此处编辑母版副标题样式</a:t>
             </a:r>
-            <a:endParaRPr lang="zh-CN" altLang="en-US"/>
           </a:p>
         </p:txBody>
       </p:sp>
@@ -756,6 +763,7 @@
           <a:p>
             <a:fld id="{82F288E0-7875-42C4-84C8-98DBBD3BF4D2}" type="datetimeFigureOut">
               <a:rPr lang="zh-CN" altLang="en-US" smtClean="0"/>
+              <a:t>2026/9/15</a:t>
             </a:fld>
             <a:endParaRPr lang="zh-CN" altLang="en-US"/>
           </a:p>
@@ -797,6 +805,7 @@
           <a:p>
             <a:fld id="{7D9BB5D0-35E4-459D-AEF3-FE4D7C45CC19}" type="slidenum">
               <a:rPr lang="zh-CN" altLang="en-US" smtClean="0"/>
+              <a:t>‹#›</a:t>
             </a:fld>
             <a:endParaRPr lang="zh-CN" altLang="en-US"/>
           </a:p>
@@ -852,7 +861,6 @@
               <a:rPr lang="zh-CN" altLang="en-US"/>
               <a:t>单击此处编辑母版文本样式</a:t>
             </a:r>
-            <a:endParaRPr lang="zh-CN" altLang="en-US"/>
           </a:p>
           <a:p>
             <a:pPr lvl="1"/>
@@ -860,7 +868,6 @@
               <a:rPr lang="zh-CN" altLang="en-US"/>
               <a:t>第二级</a:t>
             </a:r>
-            <a:endParaRPr lang="zh-CN" altLang="en-US"/>
           </a:p>
           <a:p>
             <a:pPr lvl="2"/>
@@ -868,7 +875,6 @@
               <a:rPr lang="zh-CN" altLang="en-US"/>
               <a:t>第三级</a:t>
             </a:r>
-            <a:endParaRPr lang="zh-CN" altLang="en-US"/>
           </a:p>
           <a:p>
             <a:pPr lvl="3"/>
@@ -876,7 +882,6 @@
               <a:rPr lang="zh-CN" altLang="en-US"/>
               <a:t>第四级</a:t>
             </a:r>
-            <a:endParaRPr lang="zh-CN" altLang="en-US"/>
           </a:p>
           <a:p>
             <a:pPr lvl="4"/>
@@ -884,7 +889,6 @@
               <a:rPr lang="zh-CN" altLang="en-US"/>
               <a:t>第五级</a:t>
             </a:r>
-            <a:endParaRPr lang="zh-CN" altLang="en-US"/>
           </a:p>
         </p:txBody>
       </p:sp>
@@ -905,6 +909,7 @@
           <a:p>
             <a:fld id="{82F288E0-7875-42C4-84C8-98DBBD3BF4D2}" type="datetimeFigureOut">
               <a:rPr lang="zh-CN" altLang="en-US" smtClean="0"/>
+              <a:t>2026/9/15</a:t>
             </a:fld>
             <a:endParaRPr lang="zh-CN" altLang="en-US"/>
           </a:p>
@@ -946,6 +951,7 @@
           <a:p>
             <a:fld id="{7D9BB5D0-35E4-459D-AEF3-FE4D7C45CC19}" type="slidenum">
               <a:rPr lang="zh-CN" altLang="en-US" smtClean="0"/>
+              <a:t>‹#›</a:t>
             </a:fld>
             <a:endParaRPr lang="zh-CN" altLang="en-US"/>
           </a:p>
@@ -995,7 +1001,6 @@
               <a:rPr lang="zh-CN" altLang="en-US"/>
               <a:t>单击此处编辑母版标题样式</a:t>
             </a:r>
-            <a:endParaRPr lang="zh-CN" altLang="en-US"/>
           </a:p>
         </p:txBody>
       </p:sp>
@@ -1019,7 +1024,6 @@
               <a:rPr lang="zh-CN" altLang="en-US"/>
               <a:t>单击此处编辑母版文本样式</a:t>
             </a:r>
-            <a:endParaRPr lang="zh-CN" altLang="en-US"/>
           </a:p>
           <a:p>
             <a:pPr lvl="1"/>
@@ -1027,7 +1031,6 @@
               <a:rPr lang="zh-CN" altLang="en-US"/>
               <a:t>第二级</a:t>
             </a:r>
-            <a:endParaRPr lang="zh-CN" altLang="en-US"/>
           </a:p>
           <a:p>
             <a:pPr lvl="2"/>
@@ -1035,7 +1038,6 @@
               <a:rPr lang="zh-CN" altLang="en-US"/>
               <a:t>第三级</a:t>
             </a:r>
-            <a:endParaRPr lang="zh-CN" altLang="en-US"/>
           </a:p>
           <a:p>
             <a:pPr lvl="3"/>
@@ -1043,7 +1045,6 @@
               <a:rPr lang="zh-CN" altLang="en-US"/>
               <a:t>第四级</a:t>
             </a:r>
-            <a:endParaRPr lang="zh-CN" altLang="en-US"/>
           </a:p>
           <a:p>
             <a:pPr lvl="4"/>
@@ -1051,7 +1052,6 @@
               <a:rPr lang="zh-CN" altLang="en-US"/>
               <a:t>第五级</a:t>
             </a:r>
-            <a:endParaRPr lang="zh-CN" altLang="en-US"/>
           </a:p>
         </p:txBody>
       </p:sp>
@@ -1072,6 +1072,7 @@
           <a:p>
             <a:fld id="{82F288E0-7875-42C4-84C8-98DBBD3BF4D2}" type="datetimeFigureOut">
               <a:rPr lang="zh-CN" altLang="en-US" smtClean="0"/>
+              <a:t>2026/9/15</a:t>
             </a:fld>
             <a:endParaRPr lang="zh-CN" altLang="en-US"/>
           </a:p>
@@ -1113,6 +1114,7 @@
           <a:p>
             <a:fld id="{7D9BB5D0-35E4-459D-AEF3-FE4D7C45CC19}" type="slidenum">
               <a:rPr lang="zh-CN" altLang="en-US" smtClean="0"/>
+              <a:t>‹#›</a:t>
             </a:fld>
             <a:endParaRPr lang="zh-CN" altLang="en-US"/>
           </a:p>
@@ -1171,7 +1173,6 @@
               <a:rPr lang="zh-CN" altLang="en-US"/>
               <a:t>单击此处编辑母版标题样式</a:t>
             </a:r>
-            <a:endParaRPr lang="zh-CN" altLang="en-US"/>
           </a:p>
         </p:txBody>
       </p:sp>
@@ -1291,7 +1292,6 @@
               <a:rPr lang="zh-CN" altLang="en-US"/>
               <a:t>单击此处编辑母版文本样式</a:t>
             </a:r>
-            <a:endParaRPr lang="zh-CN" altLang="en-US"/>
           </a:p>
         </p:txBody>
       </p:sp>
@@ -1312,6 +1312,7 @@
           <a:p>
             <a:fld id="{82F288E0-7875-42C4-84C8-98DBBD3BF4D2}" type="datetimeFigureOut">
               <a:rPr lang="zh-CN" altLang="en-US" smtClean="0"/>
+              <a:t>2026/9/15</a:t>
             </a:fld>
             <a:endParaRPr lang="zh-CN" altLang="en-US"/>
           </a:p>
@@ -1353,6 +1354,7 @@
           <a:p>
             <a:fld id="{7D9BB5D0-35E4-459D-AEF3-FE4D7C45CC19}" type="slidenum">
               <a:rPr lang="zh-CN" altLang="en-US" smtClean="0"/>
+              <a:t>‹#›</a:t>
             </a:fld>
             <a:endParaRPr lang="zh-CN" altLang="en-US"/>
           </a:p>
@@ -1402,7 +1404,6 @@
               <a:rPr lang="zh-CN" altLang="en-US"/>
               <a:t>单击此处编辑母版标题样式</a:t>
             </a:r>
-            <a:endParaRPr lang="zh-CN" altLang="en-US"/>
           </a:p>
         </p:txBody>
       </p:sp>
@@ -1431,7 +1432,6 @@
               <a:rPr lang="zh-CN" altLang="en-US"/>
               <a:t>单击此处编辑母版文本样式</a:t>
             </a:r>
-            <a:endParaRPr lang="zh-CN" altLang="en-US"/>
           </a:p>
           <a:p>
             <a:pPr lvl="1"/>
@@ -1439,7 +1439,6 @@
               <a:rPr lang="zh-CN" altLang="en-US"/>
               <a:t>第二级</a:t>
             </a:r>
-            <a:endParaRPr lang="zh-CN" altLang="en-US"/>
           </a:p>
           <a:p>
             <a:pPr lvl="2"/>
@@ -1447,7 +1446,6 @@
               <a:rPr lang="zh-CN" altLang="en-US"/>
               <a:t>第三级</a:t>
             </a:r>
-            <a:endParaRPr lang="zh-CN" altLang="en-US"/>
           </a:p>
           <a:p>
             <a:pPr lvl="3"/>
@@ -1455,7 +1453,6 @@
               <a:rPr lang="zh-CN" altLang="en-US"/>
               <a:t>第四级</a:t>
             </a:r>
-            <a:endParaRPr lang="zh-CN" altLang="en-US"/>
           </a:p>
           <a:p>
             <a:pPr lvl="4"/>
@@ -1463,7 +1460,6 @@
               <a:rPr lang="zh-CN" altLang="en-US"/>
               <a:t>第五级</a:t>
             </a:r>
-            <a:endParaRPr lang="zh-CN" altLang="en-US"/>
           </a:p>
         </p:txBody>
       </p:sp>
@@ -1492,7 +1488,6 @@
               <a:rPr lang="zh-CN" altLang="en-US"/>
               <a:t>单击此处编辑母版文本样式</a:t>
             </a:r>
-            <a:endParaRPr lang="zh-CN" altLang="en-US"/>
           </a:p>
           <a:p>
             <a:pPr lvl="1"/>
@@ -1500,7 +1495,6 @@
               <a:rPr lang="zh-CN" altLang="en-US"/>
               <a:t>第二级</a:t>
             </a:r>
-            <a:endParaRPr lang="zh-CN" altLang="en-US"/>
           </a:p>
           <a:p>
             <a:pPr lvl="2"/>
@@ -1508,7 +1502,6 @@
               <a:rPr lang="zh-CN" altLang="en-US"/>
               <a:t>第三级</a:t>
             </a:r>
-            <a:endParaRPr lang="zh-CN" altLang="en-US"/>
           </a:p>
           <a:p>
             <a:pPr lvl="3"/>
@@ -1516,7 +1509,6 @@
               <a:rPr lang="zh-CN" altLang="en-US"/>
               <a:t>第四级</a:t>
             </a:r>
-            <a:endParaRPr lang="zh-CN" altLang="en-US"/>
           </a:p>
           <a:p>
             <a:pPr lvl="4"/>
@@ -1524,7 +1516,6 @@
               <a:rPr lang="zh-CN" altLang="en-US"/>
               <a:t>第五级</a:t>
             </a:r>
-            <a:endParaRPr lang="zh-CN" altLang="en-US"/>
           </a:p>
         </p:txBody>
       </p:sp>
@@ -1545,6 +1536,7 @@
           <a:p>
             <a:fld id="{82F288E0-7875-42C4-84C8-98DBBD3BF4D2}" type="datetimeFigureOut">
               <a:rPr lang="zh-CN" altLang="en-US" smtClean="0"/>
+              <a:t>2026/9/15</a:t>
             </a:fld>
             <a:endParaRPr lang="zh-CN" altLang="en-US"/>
           </a:p>
@@ -1586,6 +1578,7 @@
           <a:p>
             <a:fld id="{7D9BB5D0-35E4-459D-AEF3-FE4D7C45CC19}" type="slidenum">
               <a:rPr lang="zh-CN" altLang="en-US" smtClean="0"/>
+              <a:t>‹#›</a:t>
             </a:fld>
             <a:endParaRPr lang="zh-CN" altLang="en-US"/>
           </a:p>
@@ -1640,7 +1633,6 @@
               <a:rPr lang="zh-CN" altLang="en-US"/>
               <a:t>单击此处编辑母版标题样式</a:t>
             </a:r>
-            <a:endParaRPr lang="zh-CN" altLang="en-US"/>
           </a:p>
         </p:txBody>
       </p:sp>
@@ -1706,7 +1698,6 @@
               <a:rPr lang="zh-CN" altLang="en-US"/>
               <a:t>单击此处编辑母版文本样式</a:t>
             </a:r>
-            <a:endParaRPr lang="zh-CN" altLang="en-US"/>
           </a:p>
         </p:txBody>
       </p:sp>
@@ -1735,7 +1726,6 @@
               <a:rPr lang="zh-CN" altLang="en-US"/>
               <a:t>单击此处编辑母版文本样式</a:t>
             </a:r>
-            <a:endParaRPr lang="zh-CN" altLang="en-US"/>
           </a:p>
           <a:p>
             <a:pPr lvl="1"/>
@@ -1743,7 +1733,6 @@
               <a:rPr lang="zh-CN" altLang="en-US"/>
               <a:t>第二级</a:t>
             </a:r>
-            <a:endParaRPr lang="zh-CN" altLang="en-US"/>
           </a:p>
           <a:p>
             <a:pPr lvl="2"/>
@@ -1751,7 +1740,6 @@
               <a:rPr lang="zh-CN" altLang="en-US"/>
               <a:t>第三级</a:t>
             </a:r>
-            <a:endParaRPr lang="zh-CN" altLang="en-US"/>
           </a:p>
           <a:p>
             <a:pPr lvl="3"/>
@@ -1759,7 +1747,6 @@
               <a:rPr lang="zh-CN" altLang="en-US"/>
               <a:t>第四级</a:t>
             </a:r>
-            <a:endParaRPr lang="zh-CN" altLang="en-US"/>
           </a:p>
           <a:p>
             <a:pPr lvl="4"/>
@@ -1767,7 +1754,6 @@
               <a:rPr lang="zh-CN" altLang="en-US"/>
               <a:t>第五级</a:t>
             </a:r>
-            <a:endParaRPr lang="zh-CN" altLang="en-US"/>
           </a:p>
         </p:txBody>
       </p:sp>
@@ -1833,7 +1819,6 @@
               <a:rPr lang="zh-CN" altLang="en-US"/>
               <a:t>单击此处编辑母版文本样式</a:t>
             </a:r>
-            <a:endParaRPr lang="zh-CN" altLang="en-US"/>
           </a:p>
         </p:txBody>
       </p:sp>
@@ -1862,7 +1847,6 @@
               <a:rPr lang="zh-CN" altLang="en-US"/>
               <a:t>单击此处编辑母版文本样式</a:t>
             </a:r>
-            <a:endParaRPr lang="zh-CN" altLang="en-US"/>
           </a:p>
           <a:p>
             <a:pPr lvl="1"/>
@@ -1870,7 +1854,6 @@
               <a:rPr lang="zh-CN" altLang="en-US"/>
               <a:t>第二级</a:t>
             </a:r>
-            <a:endParaRPr lang="zh-CN" altLang="en-US"/>
           </a:p>
           <a:p>
             <a:pPr lvl="2"/>
@@ -1878,7 +1861,6 @@
               <a:rPr lang="zh-CN" altLang="en-US"/>
               <a:t>第三级</a:t>
             </a:r>
-            <a:endParaRPr lang="zh-CN" altLang="en-US"/>
           </a:p>
           <a:p>
             <a:pPr lvl="3"/>
@@ -1886,7 +1868,6 @@
               <a:rPr lang="zh-CN" altLang="en-US"/>
               <a:t>第四级</a:t>
             </a:r>
-            <a:endParaRPr lang="zh-CN" altLang="en-US"/>
           </a:p>
           <a:p>
             <a:pPr lvl="4"/>
@@ -1894,7 +1875,6 @@
               <a:rPr lang="zh-CN" altLang="en-US"/>
               <a:t>第五级</a:t>
             </a:r>
-            <a:endParaRPr lang="zh-CN" altLang="en-US"/>
           </a:p>
         </p:txBody>
       </p:sp>
@@ -1915,6 +1895,7 @@
           <a:p>
             <a:fld id="{82F288E0-7875-42C4-84C8-98DBBD3BF4D2}" type="datetimeFigureOut">
               <a:rPr lang="zh-CN" altLang="en-US" smtClean="0"/>
+              <a:t>2026/9/15</a:t>
             </a:fld>
             <a:endParaRPr lang="zh-CN" altLang="en-US"/>
           </a:p>
@@ -1956,6 +1937,7 @@
           <a:p>
             <a:fld id="{7D9BB5D0-35E4-459D-AEF3-FE4D7C45CC19}" type="slidenum">
               <a:rPr lang="zh-CN" altLang="en-US" smtClean="0"/>
+              <a:t>‹#›</a:t>
             </a:fld>
             <a:endParaRPr lang="zh-CN" altLang="en-US"/>
           </a:p>
@@ -2005,7 +1987,6 @@
               <a:rPr lang="zh-CN" altLang="en-US"/>
               <a:t>单击此处编辑母版标题样式</a:t>
             </a:r>
-            <a:endParaRPr lang="zh-CN" altLang="en-US"/>
           </a:p>
         </p:txBody>
       </p:sp>
@@ -2026,6 +2007,7 @@
           <a:p>
             <a:fld id="{82F288E0-7875-42C4-84C8-98DBBD3BF4D2}" type="datetimeFigureOut">
               <a:rPr lang="zh-CN" altLang="en-US" smtClean="0"/>
+              <a:t>2026/9/15</a:t>
             </a:fld>
             <a:endParaRPr lang="zh-CN" altLang="en-US"/>
           </a:p>
@@ -2067,6 +2049,7 @@
           <a:p>
             <a:fld id="{7D9BB5D0-35E4-459D-AEF3-FE4D7C45CC19}" type="slidenum">
               <a:rPr lang="zh-CN" altLang="en-US" smtClean="0"/>
+              <a:t>‹#›</a:t>
             </a:fld>
             <a:endParaRPr lang="zh-CN" altLang="en-US"/>
           </a:p>
@@ -2114,6 +2097,7 @@
           <a:p>
             <a:fld id="{82F288E0-7875-42C4-84C8-98DBBD3BF4D2}" type="datetimeFigureOut">
               <a:rPr lang="zh-CN" altLang="en-US" smtClean="0"/>
+              <a:t>2026/9/15</a:t>
             </a:fld>
             <a:endParaRPr lang="zh-CN" altLang="en-US"/>
           </a:p>
@@ -2155,6 +2139,7 @@
           <a:p>
             <a:fld id="{7D9BB5D0-35E4-459D-AEF3-FE4D7C45CC19}" type="slidenum">
               <a:rPr lang="zh-CN" altLang="en-US" smtClean="0"/>
+              <a:t>‹#›</a:t>
             </a:fld>
             <a:endParaRPr lang="zh-CN" altLang="en-US"/>
           </a:p>
@@ -2213,7 +2198,6 @@
               <a:rPr lang="zh-CN" altLang="en-US"/>
               <a:t>单击此处编辑母版标题样式</a:t>
             </a:r>
-            <a:endParaRPr lang="zh-CN" altLang="en-US"/>
           </a:p>
         </p:txBody>
       </p:sp>
@@ -2340,7 +2324,6 @@
               <a:rPr lang="zh-CN" altLang="en-US"/>
               <a:t>单击此处编辑母版文本样式</a:t>
             </a:r>
-            <a:endParaRPr lang="zh-CN" altLang="en-US"/>
           </a:p>
         </p:txBody>
       </p:sp>
@@ -2361,6 +2344,7 @@
           <a:p>
             <a:fld id="{82F288E0-7875-42C4-84C8-98DBBD3BF4D2}" type="datetimeFigureOut">
               <a:rPr lang="zh-CN" altLang="en-US" smtClean="0"/>
+              <a:t>2026/9/15</a:t>
             </a:fld>
             <a:endParaRPr lang="zh-CN" altLang="en-US"/>
           </a:p>
@@ -2402,6 +2386,7 @@
           <a:p>
             <a:fld id="{7D9BB5D0-35E4-459D-AEF3-FE4D7C45CC19}" type="slidenum">
               <a:rPr lang="zh-CN" altLang="en-US" smtClean="0"/>
+              <a:t>‹#›</a:t>
             </a:fld>
             <a:endParaRPr lang="zh-CN" altLang="en-US"/>
           </a:p>
@@ -2456,7 +2441,6 @@
               <a:rPr lang="zh-CN" altLang="en-US"/>
               <a:t>单击此处编辑母版标题样式</a:t>
             </a:r>
-            <a:endParaRPr lang="zh-CN" altLang="en-US"/>
           </a:p>
         </p:txBody>
       </p:sp>
@@ -2485,7 +2469,6 @@
               <a:rPr lang="zh-CN" altLang="en-US"/>
               <a:t>单击此处编辑母版文本样式</a:t>
             </a:r>
-            <a:endParaRPr lang="zh-CN" altLang="en-US"/>
           </a:p>
           <a:p>
             <a:pPr lvl="1"/>
@@ -2493,7 +2476,6 @@
               <a:rPr lang="zh-CN" altLang="en-US"/>
               <a:t>第二级</a:t>
             </a:r>
-            <a:endParaRPr lang="zh-CN" altLang="en-US"/>
           </a:p>
           <a:p>
             <a:pPr lvl="2"/>
@@ -2501,7 +2483,6 @@
               <a:rPr lang="zh-CN" altLang="en-US"/>
               <a:t>第三级</a:t>
             </a:r>
-            <a:endParaRPr lang="zh-CN" altLang="en-US"/>
           </a:p>
           <a:p>
             <a:pPr lvl="3"/>
@@ -2509,7 +2490,6 @@
               <a:rPr lang="zh-CN" altLang="en-US"/>
               <a:t>第四级</a:t>
             </a:r>
-            <a:endParaRPr lang="zh-CN" altLang="en-US"/>
           </a:p>
           <a:p>
             <a:pPr lvl="4"/>
@@ -2517,7 +2497,6 @@
               <a:rPr lang="zh-CN" altLang="en-US"/>
               <a:t>第五级</a:t>
             </a:r>
-            <a:endParaRPr lang="zh-CN" altLang="en-US"/>
           </a:p>
         </p:txBody>
       </p:sp>
@@ -2538,6 +2517,7 @@
           <a:p>
             <a:fld id="{82F288E0-7875-42C4-84C8-98DBBD3BF4D2}" type="datetimeFigureOut">
               <a:rPr lang="zh-CN" altLang="en-US" smtClean="0"/>
+              <a:t>2026/9/15</a:t>
             </a:fld>
             <a:endParaRPr lang="zh-CN" altLang="en-US"/>
           </a:p>
@@ -2579,6 +2559,7 @@
           <a:p>
             <a:fld id="{7D9BB5D0-35E4-459D-AEF3-FE4D7C45CC19}" type="slidenum">
               <a:rPr lang="zh-CN" altLang="en-US" smtClean="0"/>
+              <a:t>‹#›</a:t>
             </a:fld>
             <a:endParaRPr lang="zh-CN" altLang="en-US"/>
           </a:p>
@@ -2643,7 +2624,6 @@
               <a:rPr lang="zh-CN" altLang="en-US"/>
               <a:t>单击此处编辑母版标题样式</a:t>
             </a:r>
-            <a:endParaRPr lang="zh-CN" altLang="en-US"/>
           </a:p>
         </p:txBody>
       </p:sp>
@@ -2677,7 +2657,6 @@
               <a:rPr lang="zh-CN" altLang="en-US"/>
               <a:t>单击此处编辑母版文本样式</a:t>
             </a:r>
-            <a:endParaRPr lang="zh-CN" altLang="en-US"/>
           </a:p>
           <a:p>
             <a:pPr lvl="1"/>
@@ -2685,7 +2664,6 @@
               <a:rPr lang="zh-CN" altLang="en-US"/>
               <a:t>第二级</a:t>
             </a:r>
-            <a:endParaRPr lang="zh-CN" altLang="en-US"/>
           </a:p>
           <a:p>
             <a:pPr lvl="2"/>
@@ -2693,7 +2671,6 @@
               <a:rPr lang="zh-CN" altLang="en-US"/>
               <a:t>第三级</a:t>
             </a:r>
-            <a:endParaRPr lang="zh-CN" altLang="en-US"/>
           </a:p>
           <a:p>
             <a:pPr lvl="3"/>
@@ -2701,7 +2678,6 @@
               <a:rPr lang="zh-CN" altLang="en-US"/>
               <a:t>第四级</a:t>
             </a:r>
-            <a:endParaRPr lang="zh-CN" altLang="en-US"/>
           </a:p>
           <a:p>
             <a:pPr lvl="4"/>
@@ -2709,7 +2685,6 @@
               <a:rPr lang="zh-CN" altLang="en-US"/>
               <a:t>第五级</a:t>
             </a:r>
-            <a:endParaRPr lang="zh-CN" altLang="en-US"/>
           </a:p>
         </p:txBody>
       </p:sp>
@@ -2748,6 +2723,7 @@
           <a:p>
             <a:fld id="{82F288E0-7875-42C4-84C8-98DBBD3BF4D2}" type="datetimeFigureOut">
               <a:rPr lang="zh-CN" altLang="en-US" smtClean="0"/>
+              <a:t>2026/9/15</a:t>
             </a:fld>
             <a:endParaRPr lang="zh-CN" altLang="en-US"/>
           </a:p>
@@ -2825,6 +2801,7 @@
           <a:p>
             <a:fld id="{7D9BB5D0-35E4-459D-AEF3-FE4D7C45CC19}" type="slidenum">
               <a:rPr lang="zh-CN" altLang="en-US" smtClean="0"/>
+              <a:t>‹#›</a:t>
             </a:fld>
             <a:endParaRPr lang="zh-CN" altLang="en-US"/>
           </a:p>
@@ -3134,7 +3111,7 @@
     <p:bg>
       <p:bgPr>
         <a:blipFill rotWithShape="1">
-          <a:blip r:embed="rId1"/>
+          <a:blip r:embed="rId2"/>
           <a:stretch>
             <a:fillRect/>
           </a:stretch>
@@ -3179,7 +3156,7 @@
             <p:nvPr/>
           </p:nvPicPr>
           <p:blipFill>
-            <a:blip r:embed="rId2"/>
+            <a:blip r:embed="rId3"/>
             <a:srcRect r="51034" b="-4972"/>
             <a:stretch>
               <a:fillRect/>
@@ -3269,7 +3246,7 @@
               <a:lstStyle/>
               <a:p>
                 <a:r>
-                  <a:rPr lang="en-US" altLang="zh-CN" sz="1600" b="1" i="1" dirty="0" smtClean="0">
+                  <a:rPr lang="en-US" altLang="zh-CN" sz="1600" b="1" i="1" dirty="0">
                     <a:solidFill>
                       <a:schemeClr val="bg1"/>
                     </a:solidFill>
@@ -3279,7 +3256,7 @@
                   <a:t>Python</a:t>
                 </a:r>
                 <a:r>
-                  <a:rPr lang="zh-CN" altLang="en-US" sz="1600" b="1" i="1" dirty="0" smtClean="0">
+                  <a:rPr lang="zh-CN" altLang="en-US" sz="1600" b="1" i="1" dirty="0">
                     <a:solidFill>
                       <a:schemeClr val="bg1"/>
                     </a:solidFill>
@@ -3289,7 +3266,7 @@
                   <a:t>实战大课堂</a:t>
                 </a:r>
                 <a:r>
-                  <a:rPr lang="en-US" altLang="zh-CN" sz="1600" b="1" i="1" dirty="0" smtClean="0">
+                  <a:rPr lang="en-US" altLang="zh-CN" sz="1600" b="1" i="1" dirty="0">
                     <a:solidFill>
                       <a:schemeClr val="bg1"/>
                     </a:solidFill>
@@ -3299,7 +3276,7 @@
                   <a:t> </a:t>
                 </a:r>
                 <a:r>
-                  <a:rPr lang="zh-CN" altLang="en-US" sz="1600" b="1" i="1" dirty="0" smtClean="0">
+                  <a:rPr lang="zh-CN" altLang="en-US" sz="1600" b="1" i="1" dirty="0">
                     <a:solidFill>
                       <a:schemeClr val="bg1"/>
                     </a:solidFill>
@@ -3309,7 +3286,7 @@
                   <a:t>·</a:t>
                 </a:r>
                 <a:r>
-                  <a:rPr lang="en-US" altLang="zh-CN" sz="1600" b="1" i="1" dirty="0" smtClean="0">
+                  <a:rPr lang="en-US" altLang="zh-CN" sz="1600" b="1" i="1" dirty="0">
                     <a:solidFill>
                       <a:schemeClr val="bg1"/>
                     </a:solidFill>
@@ -3318,13 +3295,6 @@
                   </a:rPr>
                   <a:t> 2026</a:t>
                 </a:r>
-                <a:endParaRPr lang="en-US" altLang="zh-CN" sz="1600" b="1" i="1" dirty="0" smtClean="0">
-                  <a:solidFill>
-                    <a:schemeClr val="bg1"/>
-                  </a:solidFill>
-                  <a:latin typeface="等线" panose="02010600030101010101" pitchFamily="2" charset="-122"/>
-                  <a:ea typeface="等线" panose="02010600030101010101" pitchFamily="2" charset="-122"/>
-                </a:endParaRPr>
               </a:p>
             </p:txBody>
           </p:sp>
@@ -3427,19 +3397,9 @@
                   </a:schemeClr>
                 </a:solidFill>
               </a:rPr>
-              <a:t>课程</a:t>
-            </a:r>
-            <a:r>
-              <a:rPr lang="zh-CN" altLang="en-US" dirty="0" smtClean="0">
-                <a:solidFill>
-                  <a:schemeClr val="accent2">
-                    <a:lumMod val="50000"/>
-                  </a:schemeClr>
-                </a:solidFill>
-              </a:rPr>
-              <a:t>名称</a:t>
-            </a:r>
-            <a:endParaRPr lang="zh-CN" altLang="en-US" sz="3600" dirty="0" smtClean="0">
+              <a:t>课程名称</a:t>
+            </a:r>
+            <a:endParaRPr lang="zh-CN" altLang="en-US" sz="3600" dirty="0">
               <a:solidFill>
                 <a:schemeClr val="accent2">
                   <a:lumMod val="50000"/>
@@ -3477,7 +3437,7 @@
               </a:spcBef>
             </a:pPr>
             <a:r>
-              <a:rPr lang="en-US" altLang="zh-CN" sz="2400" b="1" dirty="0" smtClean="0">
+              <a:rPr lang="en-US" altLang="zh-CN" sz="2400" b="1" dirty="0">
                 <a:solidFill>
                   <a:schemeClr val="accent2">
                     <a:lumMod val="50000"/>
@@ -3490,7 +3450,7 @@
               <a:t>XX</a:t>
             </a:r>
             <a:r>
-              <a:rPr lang="zh-CN" altLang="en-US" sz="2400" b="1" dirty="0" smtClean="0">
+              <a:rPr lang="zh-CN" altLang="en-US" sz="2400" b="1" dirty="0">
                 <a:solidFill>
                   <a:schemeClr val="accent2">
                     <a:lumMod val="50000"/>
@@ -3503,7 +3463,7 @@
               <a:t>团队   </a:t>
             </a:r>
             <a:r>
-              <a:rPr lang="en-US" altLang="zh-CN" sz="2400" b="1" dirty="0" smtClean="0">
+              <a:rPr lang="en-US" altLang="zh-CN" sz="2400" b="1" dirty="0">
                 <a:solidFill>
                   <a:schemeClr val="accent2">
                     <a:lumMod val="50000"/>
@@ -3515,16 +3475,6 @@
               </a:rPr>
               <a:t>XXX</a:t>
             </a:r>
-            <a:endParaRPr lang="en-US" altLang="zh-CN" sz="2400" b="1" dirty="0" smtClean="0">
-              <a:solidFill>
-                <a:schemeClr val="accent2">
-                  <a:lumMod val="50000"/>
-                </a:schemeClr>
-              </a:solidFill>
-              <a:latin typeface="方正银联黑简体" panose="02000000000000000000" pitchFamily="2" charset="-122"/>
-              <a:ea typeface="方正银联黑简体" panose="02000000000000000000" pitchFamily="2" charset="-122"/>
-              <a:cs typeface="方正银联黑简体" panose="02000000000000000000" pitchFamily="2" charset="-122"/>
-            </a:endParaRPr>
           </a:p>
           <a:p>
             <a:pPr algn="ctr">
@@ -3533,7 +3483,7 @@
               </a:spcBef>
             </a:pPr>
             <a:r>
-              <a:rPr lang="en-US" altLang="zh-CN" sz="2400" b="1" dirty="0" smtClean="0">
+              <a:rPr lang="en-US" altLang="zh-CN" sz="2400" b="1" dirty="0">
                 <a:solidFill>
                   <a:schemeClr val="accent2">
                     <a:lumMod val="50000"/>
@@ -3546,7 +3496,7 @@
               <a:t>X</a:t>
             </a:r>
             <a:r>
-              <a:rPr lang="zh-CN" altLang="en-US" sz="2400" b="1" dirty="0" smtClean="0">
+              <a:rPr lang="zh-CN" altLang="en-US" sz="2400" b="1" dirty="0">
                 <a:solidFill>
                   <a:schemeClr val="accent2">
                     <a:lumMod val="50000"/>
@@ -3559,7 +3509,7 @@
               <a:t>年</a:t>
             </a:r>
             <a:r>
-              <a:rPr lang="en-US" altLang="zh-CN" sz="2400" b="1" dirty="0" smtClean="0">
+              <a:rPr lang="en-US" altLang="zh-CN" sz="2400" b="1" dirty="0">
                 <a:solidFill>
                   <a:schemeClr val="accent2">
                     <a:lumMod val="50000"/>
@@ -3572,7 +3522,7 @@
               <a:t>X</a:t>
             </a:r>
             <a:r>
-              <a:rPr lang="zh-CN" altLang="en-US" sz="2400" b="1" dirty="0" smtClean="0">
+              <a:rPr lang="zh-CN" altLang="en-US" sz="2400" b="1" dirty="0">
                 <a:solidFill>
                   <a:schemeClr val="accent2">
                     <a:lumMod val="50000"/>
@@ -3585,7 +3535,7 @@
               <a:t>月</a:t>
             </a:r>
             <a:r>
-              <a:rPr lang="en-US" altLang="zh-CN" sz="2400" b="1" dirty="0" smtClean="0">
+              <a:rPr lang="en-US" altLang="zh-CN" sz="2400" b="1" dirty="0">
                 <a:solidFill>
                   <a:schemeClr val="accent2">
                     <a:lumMod val="50000"/>
@@ -3598,7 +3548,7 @@
               <a:t>X</a:t>
             </a:r>
             <a:r>
-              <a:rPr lang="zh-CN" altLang="en-US" sz="2400" b="1" dirty="0" smtClean="0">
+              <a:rPr lang="zh-CN" altLang="en-US" sz="2400" b="1" dirty="0">
                 <a:solidFill>
                   <a:schemeClr val="accent2">
                     <a:lumMod val="50000"/>
@@ -3610,16 +3560,6 @@
               </a:rPr>
               <a:t>日</a:t>
             </a:r>
-            <a:endParaRPr lang="zh-CN" altLang="en-US" sz="2400" b="1" dirty="0" smtClean="0">
-              <a:solidFill>
-                <a:schemeClr val="accent2">
-                  <a:lumMod val="50000"/>
-                </a:schemeClr>
-              </a:solidFill>
-              <a:latin typeface="方正银联黑简体" panose="02000000000000000000" pitchFamily="2" charset="-122"/>
-              <a:ea typeface="方正银联黑简体" panose="02000000000000000000" pitchFamily="2" charset="-122"/>
-              <a:cs typeface="方正银联黑简体" panose="02000000000000000000" pitchFamily="2" charset="-122"/>
-            </a:endParaRPr>
           </a:p>
         </p:txBody>
       </p:sp>
@@ -3668,6 +3608,7 @@
           <a:bodyPr wrap="none" rtlCol="0">
             <a:spAutoFit/>
           </a:bodyPr>
+          <a:lstStyle/>
           <a:p>
             <a:r>
               <a:rPr lang="zh-CN" altLang="en-US" sz="2800" b="1" kern="1400" dirty="0">
@@ -3679,13 +3620,6 @@
               </a:rPr>
               <a:t>目录</a:t>
             </a:r>
-            <a:endParaRPr lang="zh-CN" altLang="en-US" sz="2800" b="1" kern="1400" dirty="0">
-              <a:solidFill>
-                <a:srgbClr val="FD6C40"/>
-              </a:solidFill>
-              <a:latin typeface="微软雅黑" panose="020B0503020204020204" charset="-122"/>
-              <a:ea typeface="微软雅黑" panose="020B0503020204020204" charset="-122"/>
-            </a:endParaRPr>
           </a:p>
         </p:txBody>
       </p:sp>
@@ -3983,6 +3917,7 @@
             <a:bodyPr wrap="square" rtlCol="0">
               <a:spAutoFit/>
             </a:bodyPr>
+            <a:lstStyle/>
             <a:p>
               <a:r>
                 <a:rPr lang="en-US" altLang="zh-CN" sz="1400" dirty="0">
@@ -3991,10 +3926,6 @@
                 </a:rPr>
                 <a:t>01</a:t>
               </a:r>
-              <a:endParaRPr lang="en-US" altLang="zh-CN" sz="1400" dirty="0">
-                <a:latin typeface="微软雅黑" panose="020B0503020204020204" charset="-122"/>
-                <a:ea typeface="微软雅黑" panose="020B0503020204020204" charset="-122"/>
-              </a:endParaRPr>
             </a:p>
           </p:txBody>
         </p:sp>
@@ -4103,18 +4034,15 @@
             <a:bodyPr wrap="square" rtlCol="0">
               <a:spAutoFit/>
             </a:bodyPr>
+            <a:lstStyle/>
             <a:p>
               <a:r>
-                <a:rPr lang="en-US" altLang="zh-CN" sz="1400" dirty="0" smtClean="0">
+                <a:rPr lang="en-US" altLang="zh-CN" sz="1400" dirty="0">
                   <a:latin typeface="微软雅黑" panose="020B0503020204020204" charset="-122"/>
                   <a:ea typeface="微软雅黑" panose="020B0503020204020204" charset="-122"/>
                 </a:rPr>
                 <a:t>04</a:t>
               </a:r>
-              <a:endParaRPr lang="en-US" altLang="zh-CN" sz="1400" dirty="0" smtClean="0">
-                <a:latin typeface="微软雅黑" panose="020B0503020204020204" charset="-122"/>
-                <a:ea typeface="微软雅黑" panose="020B0503020204020204" charset="-122"/>
-              </a:endParaRPr>
             </a:p>
           </p:txBody>
         </p:sp>
@@ -4223,6 +4151,7 @@
             <a:bodyPr wrap="square" rtlCol="0">
               <a:spAutoFit/>
             </a:bodyPr>
+            <a:lstStyle/>
             <a:p>
               <a:r>
                 <a:rPr lang="en-US" altLang="zh-CN" sz="1400" dirty="0">
@@ -4231,10 +4160,6 @@
                 </a:rPr>
                 <a:t>02</a:t>
               </a:r>
-              <a:endParaRPr lang="en-US" altLang="zh-CN" sz="1400" dirty="0">
-                <a:latin typeface="微软雅黑" panose="020B0503020204020204" charset="-122"/>
-                <a:ea typeface="微软雅黑" panose="020B0503020204020204" charset="-122"/>
-              </a:endParaRPr>
             </a:p>
           </p:txBody>
         </p:sp>
@@ -4343,18 +4268,15 @@
             <a:bodyPr wrap="square" rtlCol="0">
               <a:spAutoFit/>
             </a:bodyPr>
+            <a:lstStyle/>
             <a:p>
               <a:r>
-                <a:rPr lang="en-US" altLang="zh-CN" sz="1400" dirty="0" smtClean="0">
+                <a:rPr lang="en-US" altLang="zh-CN" sz="1400" dirty="0">
                   <a:latin typeface="微软雅黑" panose="020B0503020204020204" charset="-122"/>
                   <a:ea typeface="微软雅黑" panose="020B0503020204020204" charset="-122"/>
                 </a:rPr>
                 <a:t>05</a:t>
               </a:r>
-              <a:endParaRPr lang="en-US" altLang="zh-CN" sz="1400" dirty="0" smtClean="0">
-                <a:latin typeface="微软雅黑" panose="020B0503020204020204" charset="-122"/>
-                <a:ea typeface="微软雅黑" panose="020B0503020204020204" charset="-122"/>
-              </a:endParaRPr>
             </a:p>
           </p:txBody>
         </p:sp>
@@ -4463,18 +4385,15 @@
             <a:bodyPr wrap="square" rtlCol="0">
               <a:spAutoFit/>
             </a:bodyPr>
+            <a:lstStyle/>
             <a:p>
               <a:r>
-                <a:rPr lang="en-US" altLang="zh-CN" sz="1400" dirty="0" smtClean="0">
+                <a:rPr lang="en-US" altLang="zh-CN" sz="1400" dirty="0">
                   <a:latin typeface="微软雅黑" panose="020B0503020204020204" charset="-122"/>
                   <a:ea typeface="微软雅黑" panose="020B0503020204020204" charset="-122"/>
                 </a:rPr>
                 <a:t>03</a:t>
               </a:r>
-              <a:endParaRPr lang="en-US" altLang="zh-CN" sz="1400" dirty="0" smtClean="0">
-                <a:latin typeface="微软雅黑" panose="020B0503020204020204" charset="-122"/>
-                <a:ea typeface="微软雅黑" panose="020B0503020204020204" charset="-122"/>
-              </a:endParaRPr>
             </a:p>
           </p:txBody>
         </p:sp>
@@ -4499,9 +4418,10 @@
           <a:bodyPr wrap="none" rtlCol="0">
             <a:spAutoFit/>
           </a:bodyPr>
-          <a:p>
-            <a:r>
-              <a:rPr lang="en-US" altLang="zh-CN" sz="1500" dirty="0" smtClean="0">
+          <a:lstStyle/>
+          <a:p>
+            <a:r>
+              <a:rPr lang="en-US" altLang="zh-CN" sz="1500" dirty="0">
                 <a:solidFill>
                   <a:schemeClr val="accent2">
                     <a:lumMod val="50000"/>
@@ -4512,15 +4432,6 @@
               </a:rPr>
               <a:t>XXXXX</a:t>
             </a:r>
-            <a:endParaRPr lang="en-US" altLang="zh-CN" sz="1500" dirty="0" smtClean="0">
-              <a:solidFill>
-                <a:schemeClr val="accent2">
-                  <a:lumMod val="50000"/>
-                </a:schemeClr>
-              </a:solidFill>
-              <a:latin typeface="微软雅黑" panose="020B0503020204020204" charset="-122"/>
-              <a:ea typeface="微软雅黑" panose="020B0503020204020204" charset="-122"/>
-            </a:endParaRPr>
           </a:p>
         </p:txBody>
       </p:sp>
@@ -4572,6 +4483,7 @@
         </p:style>
         <p:txBody>
           <a:bodyPr rtlCol="0" anchor="ctr"/>
+          <a:lstStyle/>
           <a:p>
             <a:pPr algn="ctr"/>
             <a:endParaRPr lang="zh-CN" altLang="en-US"/>
@@ -4617,6 +4529,7 @@
         </p:style>
         <p:txBody>
           <a:bodyPr rtlCol="0" anchor="ctr"/>
+          <a:lstStyle/>
           <a:p>
             <a:pPr algn="ctr"/>
             <a:endParaRPr lang="zh-CN" altLang="en-US"/>
@@ -4643,6 +4556,7 @@
           <a:bodyPr wrap="square" rtlCol="0">
             <a:spAutoFit/>
           </a:bodyPr>
+          <a:lstStyle/>
           <a:p>
             <a:r>
               <a:rPr lang="en-US" altLang="zh-CN" sz="4400" b="1" kern="1400" spc="400" dirty="0">
@@ -4654,13 +4568,6 @@
               </a:rPr>
               <a:t>CONTENTS</a:t>
             </a:r>
-            <a:endParaRPr lang="en-US" altLang="zh-CN" sz="4400" b="1" kern="1400" spc="400" dirty="0">
-              <a:solidFill>
-                <a:srgbClr val="FD7B55"/>
-              </a:solidFill>
-              <a:latin typeface="微软雅黑" panose="020B0503020204020204" charset="-122"/>
-              <a:ea typeface="微软雅黑" panose="020B0503020204020204" charset="-122"/>
-            </a:endParaRPr>
           </a:p>
         </p:txBody>
       </p:sp>
@@ -4673,7 +4580,7 @@
           <p:nvPr/>
         </p:nvPicPr>
         <p:blipFill>
-          <a:blip r:embed="rId1"/>
+          <a:blip r:embed="rId2"/>
           <a:stretch>
             <a:fillRect/>
           </a:stretch>
@@ -4717,14 +4624,14 @@
         <p:nvPicPr>
           <p:cNvPr id="7" name="内容占位符 6" descr="封面图1"/>
           <p:cNvPicPr>
-            <a:picLocks noChangeAspect="1"/>
+            <a:picLocks noGrp="1" noChangeAspect="1"/>
           </p:cNvPicPr>
           <p:nvPr>
             <p:ph idx="1"/>
           </p:nvPr>
         </p:nvPicPr>
         <p:blipFill>
-          <a:blip r:embed="rId1"/>
+          <a:blip r:embed="rId2"/>
           <a:srcRect b="84491"/>
           <a:stretch>
             <a:fillRect/>
@@ -4749,7 +4656,7 @@
           <p:nvPr/>
         </p:nvPicPr>
         <p:blipFill>
-          <a:blip r:embed="rId2"/>
+          <a:blip r:embed="rId3"/>
           <a:srcRect r="46641" b="1280"/>
           <a:stretch>
             <a:fillRect/>
@@ -4785,9 +4692,10 @@
           <a:bodyPr wrap="square" rtlCol="0">
             <a:spAutoFit/>
           </a:bodyPr>
-          <a:p>
-            <a:r>
-              <a:rPr lang="en-US" altLang="zh-CN" sz="1600" b="1" i="1" dirty="0" smtClean="0">
+          <a:lstStyle/>
+          <a:p>
+            <a:r>
+              <a:rPr lang="en-US" altLang="zh-CN" sz="1600" b="1" i="1" dirty="0">
                 <a:solidFill>
                   <a:schemeClr val="tx1"/>
                 </a:solidFill>
@@ -4797,7 +4705,7 @@
               <a:t>Python</a:t>
             </a:r>
             <a:r>
-              <a:rPr lang="zh-CN" altLang="en-US" sz="1600" b="1" i="1" dirty="0" smtClean="0">
+              <a:rPr lang="zh-CN" altLang="en-US" sz="1600" b="1" i="1" dirty="0">
                 <a:solidFill>
                   <a:schemeClr val="tx1"/>
                 </a:solidFill>
@@ -4807,7 +4715,7 @@
               <a:t>实战大课堂</a:t>
             </a:r>
             <a:r>
-              <a:rPr lang="en-US" altLang="zh-CN" sz="1600" b="1" i="1" dirty="0" smtClean="0">
+              <a:rPr lang="en-US" altLang="zh-CN" sz="1600" b="1" i="1" dirty="0">
                 <a:solidFill>
                   <a:schemeClr val="tx1"/>
                 </a:solidFill>
@@ -4817,7 +4725,7 @@
               <a:t> </a:t>
             </a:r>
             <a:r>
-              <a:rPr lang="zh-CN" altLang="en-US" sz="1600" b="1" i="1" dirty="0" smtClean="0">
+              <a:rPr lang="zh-CN" altLang="en-US" sz="1600" b="1" i="1" dirty="0">
                 <a:solidFill>
                   <a:schemeClr val="tx1"/>
                 </a:solidFill>
@@ -4827,7 +4735,7 @@
               <a:t>·</a:t>
             </a:r>
             <a:r>
-              <a:rPr lang="en-US" altLang="zh-CN" sz="1600" b="1" i="1" dirty="0" smtClean="0">
+              <a:rPr lang="en-US" altLang="zh-CN" sz="1600" b="1" i="1" dirty="0">
                 <a:solidFill>
                   <a:schemeClr val="tx1"/>
                 </a:solidFill>
@@ -4836,71 +4744,6 @@
               </a:rPr>
               <a:t> 2026</a:t>
             </a:r>
-            <a:endParaRPr lang="en-US" altLang="zh-CN" sz="1600" b="1" i="1" dirty="0" smtClean="0">
-              <a:solidFill>
-                <a:schemeClr val="tx1"/>
-              </a:solidFill>
-              <a:latin typeface="等线" panose="02010600030101010101" pitchFamily="2" charset="-122"/>
-              <a:ea typeface="等线" panose="02010600030101010101" pitchFamily="2" charset="-122"/>
-            </a:endParaRPr>
-          </a:p>
-        </p:txBody>
-      </p:sp>
-      <p:sp>
-        <p:nvSpPr>
-          <p:cNvPr id="11" name="文本框 10"/>
-          <p:cNvSpPr txBox="1"/>
-          <p:nvPr/>
-        </p:nvSpPr>
-        <p:spPr>
-          <a:xfrm>
-            <a:off x="4523006" y="2679277"/>
-            <a:ext cx="2621280" cy="829945"/>
-          </a:xfrm>
-          <a:prstGeom prst="rect">
-            <a:avLst/>
-          </a:prstGeom>
-          <a:noFill/>
-        </p:spPr>
-        <p:txBody>
-          <a:bodyPr wrap="none" rtlCol="0">
-            <a:spAutoFit/>
-          </a:bodyPr>
-          <a:lstStyle/>
-          <a:p>
-            <a:r>
-              <a:rPr lang="zh-CN" altLang="en-US" sz="4800" dirty="0" smtClean="0">
-                <a:solidFill>
-                  <a:schemeClr val="accent2">
-                    <a:lumMod val="50000"/>
-                  </a:schemeClr>
-                </a:solidFill>
-                <a:latin typeface="方正银联黑简体" panose="02000000000000000000" pitchFamily="2" charset="-122"/>
-                <a:ea typeface="方正银联黑简体" panose="02000000000000000000" pitchFamily="2" charset="-122"/>
-              </a:rPr>
-              <a:t>章节</a:t>
-            </a:r>
-            <a:r>
-              <a:rPr lang="zh-CN" altLang="en-US" sz="4800" dirty="0">
-                <a:solidFill>
-                  <a:schemeClr val="accent2">
-                    <a:lumMod val="50000"/>
-                  </a:schemeClr>
-                </a:solidFill>
-                <a:latin typeface="方正银联黑简体" panose="02000000000000000000" pitchFamily="2" charset="-122"/>
-                <a:ea typeface="方正银联黑简体" panose="02000000000000000000" pitchFamily="2" charset="-122"/>
-              </a:rPr>
-              <a:t>标题</a:t>
-            </a:r>
-            <a:endParaRPr lang="zh-CN" altLang="en-US" sz="4800" dirty="0">
-              <a:solidFill>
-                <a:schemeClr val="accent2">
-                  <a:lumMod val="50000"/>
-                </a:schemeClr>
-              </a:solidFill>
-              <a:latin typeface="方正银联黑简体" panose="02000000000000000000" pitchFamily="2" charset="-122"/>
-              <a:ea typeface="方正银联黑简体" panose="02000000000000000000" pitchFamily="2" charset="-122"/>
-            </a:endParaRPr>
           </a:p>
         </p:txBody>
       </p:sp>
@@ -4952,7 +4795,7 @@
             <p:nvPr/>
           </p:nvPicPr>
           <p:blipFill>
-            <a:blip r:embed="rId1"/>
+            <a:blip r:embed="rId2"/>
             <a:stretch>
               <a:fillRect/>
             </a:stretch>
@@ -5006,6 +4849,7 @@
           </p:style>
           <p:txBody>
             <a:bodyPr rtlCol="0" anchor="ctr"/>
+            <a:lstStyle/>
             <a:p>
               <a:pPr algn="ctr"/>
               <a:endParaRPr lang="zh-CN" altLang="en-US"/>
@@ -5022,7 +4866,7 @@
           <p:nvPr/>
         </p:nvPicPr>
         <p:blipFill>
-          <a:blip r:embed="rId2"/>
+          <a:blip r:embed="rId3"/>
           <a:srcRect r="46641" b="1280"/>
           <a:stretch>
             <a:fillRect/>
@@ -5058,9 +4902,10 @@
           <a:bodyPr wrap="square" rtlCol="0">
             <a:spAutoFit/>
           </a:bodyPr>
-          <a:p>
-            <a:r>
-              <a:rPr lang="en-US" altLang="zh-CN" sz="1600" b="1" i="1" dirty="0" smtClean="0">
+          <a:lstStyle/>
+          <a:p>
+            <a:r>
+              <a:rPr lang="en-US" altLang="zh-CN" sz="1600" b="1" i="1" dirty="0">
                 <a:solidFill>
                   <a:schemeClr val="tx1"/>
                 </a:solidFill>
@@ -5070,7 +4915,7 @@
               <a:t>Python</a:t>
             </a:r>
             <a:r>
-              <a:rPr lang="zh-CN" altLang="en-US" sz="1600" b="1" i="1" dirty="0" smtClean="0">
+              <a:rPr lang="zh-CN" altLang="en-US" sz="1600" b="1" i="1" dirty="0">
                 <a:solidFill>
                   <a:schemeClr val="tx1"/>
                 </a:solidFill>
@@ -5080,7 +4925,7 @@
               <a:t>实战大课堂</a:t>
             </a:r>
             <a:r>
-              <a:rPr lang="en-US" altLang="zh-CN" sz="1600" b="1" i="1" dirty="0" smtClean="0">
+              <a:rPr lang="en-US" altLang="zh-CN" sz="1600" b="1" i="1" dirty="0">
                 <a:solidFill>
                   <a:schemeClr val="tx1"/>
                 </a:solidFill>
@@ -5090,7 +4935,7 @@
               <a:t> </a:t>
             </a:r>
             <a:r>
-              <a:rPr lang="zh-CN" altLang="en-US" sz="1600" b="1" i="1" dirty="0" smtClean="0">
+              <a:rPr lang="zh-CN" altLang="en-US" sz="1600" b="1" i="1" dirty="0">
                 <a:solidFill>
                   <a:schemeClr val="tx1"/>
                 </a:solidFill>
@@ -5100,7 +4945,7 @@
               <a:t>·</a:t>
             </a:r>
             <a:r>
-              <a:rPr lang="en-US" altLang="zh-CN" sz="1600" b="1" i="1" dirty="0" smtClean="0">
+              <a:rPr lang="en-US" altLang="zh-CN" sz="1600" b="1" i="1" dirty="0">
                 <a:solidFill>
                   <a:schemeClr val="tx1"/>
                 </a:solidFill>
@@ -5109,48 +4954,6 @@
               </a:rPr>
               <a:t> 2026</a:t>
             </a:r>
-            <a:endParaRPr lang="en-US" altLang="zh-CN" sz="1600" b="1" i="1" dirty="0" smtClean="0">
-              <a:solidFill>
-                <a:schemeClr val="tx1"/>
-              </a:solidFill>
-              <a:latin typeface="等线" panose="02010600030101010101" pitchFamily="2" charset="-122"/>
-              <a:ea typeface="等线" panose="02010600030101010101" pitchFamily="2" charset="-122"/>
-            </a:endParaRPr>
-          </a:p>
-        </p:txBody>
-      </p:sp>
-      <p:sp>
-        <p:nvSpPr>
-          <p:cNvPr id="11" name="文本框 10"/>
-          <p:cNvSpPr txBox="1"/>
-          <p:nvPr/>
-        </p:nvSpPr>
-        <p:spPr>
-          <a:xfrm>
-            <a:off x="688340" y="1102360"/>
-            <a:ext cx="9986645" cy="368300"/>
-          </a:xfrm>
-          <a:prstGeom prst="rect">
-            <a:avLst/>
-          </a:prstGeom>
-          <a:noFill/>
-        </p:spPr>
-        <p:txBody>
-          <a:bodyPr wrap="square" rtlCol="0">
-            <a:spAutoFit/>
-          </a:bodyPr>
-          <a:p>
-            <a:r>
-              <a:rPr lang="en-US" altLang="zh-CN">
-                <a:latin typeface="方正银联黑简体" panose="02000000000000000000" pitchFamily="2" charset="-122"/>
-                <a:ea typeface="方正银联黑简体" panose="02000000000000000000" pitchFamily="2" charset="-122"/>
-              </a:rPr>
-              <a:t>XX</a:t>
-            </a:r>
-            <a:endParaRPr lang="en-US" altLang="zh-CN">
-              <a:latin typeface="方正银联黑简体" panose="02000000000000000000" pitchFamily="2" charset="-122"/>
-              <a:ea typeface="方正银联黑简体" panose="02000000000000000000" pitchFamily="2" charset="-122"/>
-            </a:endParaRPr>
           </a:p>
         </p:txBody>
       </p:sp>
@@ -5168,7 +4971,7 @@
     <p:bg>
       <p:bgPr>
         <a:blipFill rotWithShape="1">
-          <a:blip r:embed="rId1"/>
+          <a:blip r:embed="rId2"/>
           <a:stretch>
             <a:fillRect/>
           </a:stretch>
@@ -5213,7 +5016,7 @@
             <p:nvPr/>
           </p:nvPicPr>
           <p:blipFill>
-            <a:blip r:embed="rId2"/>
+            <a:blip r:embed="rId3"/>
             <a:srcRect r="51034" b="-4972"/>
             <a:stretch>
               <a:fillRect/>
@@ -5303,7 +5106,7 @@
               <a:lstStyle/>
               <a:p>
                 <a:r>
-                  <a:rPr lang="en-US" altLang="zh-CN" sz="1600" b="1" i="1" dirty="0" smtClean="0">
+                  <a:rPr lang="en-US" altLang="zh-CN" sz="1600" b="1" i="1" dirty="0">
                     <a:solidFill>
                       <a:schemeClr val="bg1"/>
                     </a:solidFill>
@@ -5313,7 +5116,7 @@
                   <a:t>Python</a:t>
                 </a:r>
                 <a:r>
-                  <a:rPr lang="zh-CN" altLang="en-US" sz="1600" b="1" i="1" dirty="0" smtClean="0">
+                  <a:rPr lang="zh-CN" altLang="en-US" sz="1600" b="1" i="1" dirty="0">
                     <a:solidFill>
                       <a:schemeClr val="bg1"/>
                     </a:solidFill>
@@ -5323,7 +5126,7 @@
                   <a:t>实战大课堂</a:t>
                 </a:r>
                 <a:r>
-                  <a:rPr lang="en-US" altLang="zh-CN" sz="1600" b="1" i="1" dirty="0" smtClean="0">
+                  <a:rPr lang="en-US" altLang="zh-CN" sz="1600" b="1" i="1" dirty="0">
                     <a:solidFill>
                       <a:schemeClr val="bg1"/>
                     </a:solidFill>
@@ -5333,7 +5136,7 @@
                   <a:t> </a:t>
                 </a:r>
                 <a:r>
-                  <a:rPr lang="zh-CN" altLang="en-US" sz="1600" b="1" i="1" dirty="0" smtClean="0">
+                  <a:rPr lang="zh-CN" altLang="en-US" sz="1600" b="1" i="1" dirty="0">
                     <a:solidFill>
                       <a:schemeClr val="bg1"/>
                     </a:solidFill>
@@ -5343,7 +5146,7 @@
                   <a:t>·</a:t>
                 </a:r>
                 <a:r>
-                  <a:rPr lang="en-US" altLang="zh-CN" sz="1600" b="1" i="1" dirty="0" smtClean="0">
+                  <a:rPr lang="en-US" altLang="zh-CN" sz="1600" b="1" i="1" dirty="0">
                     <a:solidFill>
                       <a:schemeClr val="bg1"/>
                     </a:solidFill>
@@ -5352,13 +5155,6 @@
                   </a:rPr>
                   <a:t> 2026</a:t>
                 </a:r>
-                <a:endParaRPr lang="en-US" altLang="zh-CN" sz="1600" b="1" i="1" dirty="0" smtClean="0">
-                  <a:solidFill>
-                    <a:schemeClr val="bg1"/>
-                  </a:solidFill>
-                  <a:latin typeface="等线" panose="02010600030101010101" pitchFamily="2" charset="-122"/>
-                  <a:ea typeface="等线" panose="02010600030101010101" pitchFamily="2" charset="-122"/>
-                </a:endParaRPr>
               </a:p>
             </p:txBody>
           </p:sp>
@@ -5406,7 +5202,7 @@
           </a:lstStyle>
           <a:p>
             <a:r>
-              <a:rPr lang="en-US" altLang="zh-CN" sz="4400" dirty="0" smtClean="0">
+              <a:rPr lang="en-US" altLang="zh-CN" sz="4400" dirty="0">
                 <a:solidFill>
                   <a:schemeClr val="accent2">
                     <a:lumMod val="50000"/>
@@ -5416,7 +5212,7 @@
               <a:t>Python</a:t>
             </a:r>
             <a:r>
-              <a:rPr lang="zh-CN" altLang="en-US" sz="4400" dirty="0" smtClean="0">
+              <a:rPr lang="zh-CN" altLang="en-US" sz="4400" dirty="0">
                 <a:solidFill>
                   <a:schemeClr val="accent2">
                     <a:lumMod val="50000"/>
@@ -5426,7 +5222,7 @@
               <a:t>实战大课堂</a:t>
             </a:r>
             <a:r>
-              <a:rPr lang="en-US" altLang="zh-CN" sz="4400" dirty="0" smtClean="0">
+              <a:rPr lang="en-US" altLang="zh-CN" sz="4400" dirty="0">
                 <a:solidFill>
                   <a:schemeClr val="accent2">
                     <a:lumMod val="50000"/>
@@ -5435,13 +5231,6 @@
               </a:rPr>
               <a:t> · 2026</a:t>
             </a:r>
-            <a:endParaRPr lang="en-US" altLang="zh-CN" sz="4400" dirty="0" smtClean="0">
-              <a:solidFill>
-                <a:schemeClr val="accent2">
-                  <a:lumMod val="50000"/>
-                </a:schemeClr>
-              </a:solidFill>
-            </a:endParaRPr>
           </a:p>
         </p:txBody>
       </p:sp>
@@ -5454,7 +5243,7 @@
 </file>
 
 <file path=ppt/tags/tag1.xml><?xml version="1.0" encoding="utf-8"?>
-<p:tagLst xmlns:p="http://schemas.openxmlformats.org/presentationml/2006/main">
+<p:tagLst xmlns:a="http://schemas.openxmlformats.org/drawingml/2006/main" xmlns:r="http://schemas.openxmlformats.org/officeDocument/2006/relationships" xmlns:p="http://schemas.openxmlformats.org/presentationml/2006/main">
   <p:tag name="COMMONDATA" val="eyJoZGlkIjoiMGI4YTgzNDM3OGU2NWE4ZDQ3ZGM2MWY3NzgwZGYyZmEifQ=="/>
 </p:tagLst>
 </file>
@@ -5710,6 +5499,8 @@
       </a:bgFillStyleLst>
     </a:fmtScheme>
   </a:themeElements>
+  <a:objectDefaults/>
+  <a:extraClrSchemeLst/>
   <a:extLst>
     <a:ext uri="{05A4C25C-085E-4340-85A3-A5531E510DB2}">
       <thm15:themeFamily xmlns:thm15="http://schemas.microsoft.com/office/thememl/2012/main" name="Office Theme" id="{62F939B6-93AF-4DB8-9C6B-D6C7DFDC589F}" vid="{4A3C46E8-61CC-4603-A589-7422A47A8E4A}"/>
@@ -5969,6 +5760,8 @@
       </a:bgFillStyleLst>
     </a:fmtScheme>
   </a:themeElements>
+  <a:objectDefaults/>
+  <a:extraClrSchemeLst/>
   <a:extLst>
     <a:ext uri="{05A4C25C-085E-4340-85A3-A5531E510DB2}">
       <thm15:themeFamily xmlns:thm15="http://schemas.microsoft.com/office/thememl/2012/main" name="Office Theme" id="{62F939B6-93AF-4DB8-9C6B-D6C7DFDC589F}" vid="{4A3C46E8-61CC-4603-A589-7422A47A8E4A}"/>
@@ -6228,6 +6021,8 @@
       </a:bgFillStyleLst>
     </a:fmtScheme>
   </a:themeElements>
+  <a:objectDefaults/>
+  <a:extraClrSchemeLst/>
   <a:extLst>
     <a:ext uri="{05A4C25C-085E-4340-85A3-A5531E510DB2}">
       <thm15:themeFamily xmlns:thm15="http://schemas.microsoft.com/office/thememl/2012/main" name="Office Theme" id="{62F939B6-93AF-4DB8-9C6B-D6C7DFDC589F}" vid="{4A3C46E8-61CC-4603-A589-7422A47A8E4A}"/>

--- a/docs/【课件模板】Python大课堂-课题名称.pptx
+++ b/docs/【课件模板】Python大课堂-课题名称.pptx
@@ -207,7 +207,7 @@
           <a:p>
             <a:fld id="{0F9B84EA-7D68-4D60-9CB1-D50884785D1C}" type="datetimeFigureOut">
               <a:rPr lang="zh-CN" altLang="en-US" smtClean="0"/>
-              <a:t>2026/9/15</a:t>
+              <a:t>2026/9/16</a:t>
             </a:fld>
             <a:endParaRPr lang="zh-CN" altLang="en-US"/>
           </a:p>
@@ -372,7 +372,7 @@
           <a:p>
             <a:fld id="{C798B2B1-EF87-436F-BEC6-21DF84915C76}" type="datetimeFigureOut">
               <a:rPr lang="zh-CN" altLang="en-US" smtClean="0"/>
-              <a:t>2026/9/15</a:t>
+              <a:t>2026/9/16</a:t>
             </a:fld>
             <a:endParaRPr lang="zh-CN" altLang="en-US"/>
           </a:p>
@@ -763,7 +763,7 @@
           <a:p>
             <a:fld id="{82F288E0-7875-42C4-84C8-98DBBD3BF4D2}" type="datetimeFigureOut">
               <a:rPr lang="zh-CN" altLang="en-US" smtClean="0"/>
-              <a:t>2026/9/15</a:t>
+              <a:t>2026/9/16</a:t>
             </a:fld>
             <a:endParaRPr lang="zh-CN" altLang="en-US"/>
           </a:p>
@@ -909,7 +909,7 @@
           <a:p>
             <a:fld id="{82F288E0-7875-42C4-84C8-98DBBD3BF4D2}" type="datetimeFigureOut">
               <a:rPr lang="zh-CN" altLang="en-US" smtClean="0"/>
-              <a:t>2026/9/15</a:t>
+              <a:t>2026/9/16</a:t>
             </a:fld>
             <a:endParaRPr lang="zh-CN" altLang="en-US"/>
           </a:p>
@@ -1072,7 +1072,7 @@
           <a:p>
             <a:fld id="{82F288E0-7875-42C4-84C8-98DBBD3BF4D2}" type="datetimeFigureOut">
               <a:rPr lang="zh-CN" altLang="en-US" smtClean="0"/>
-              <a:t>2026/9/15</a:t>
+              <a:t>2026/9/16</a:t>
             </a:fld>
             <a:endParaRPr lang="zh-CN" altLang="en-US"/>
           </a:p>
@@ -1312,7 +1312,7 @@
           <a:p>
             <a:fld id="{82F288E0-7875-42C4-84C8-98DBBD3BF4D2}" type="datetimeFigureOut">
               <a:rPr lang="zh-CN" altLang="en-US" smtClean="0"/>
-              <a:t>2026/9/15</a:t>
+              <a:t>2026/9/16</a:t>
             </a:fld>
             <a:endParaRPr lang="zh-CN" altLang="en-US"/>
           </a:p>
@@ -1536,7 +1536,7 @@
           <a:p>
             <a:fld id="{82F288E0-7875-42C4-84C8-98DBBD3BF4D2}" type="datetimeFigureOut">
               <a:rPr lang="zh-CN" altLang="en-US" smtClean="0"/>
-              <a:t>2026/9/15</a:t>
+              <a:t>2026/9/16</a:t>
             </a:fld>
             <a:endParaRPr lang="zh-CN" altLang="en-US"/>
           </a:p>
@@ -1895,7 +1895,7 @@
           <a:p>
             <a:fld id="{82F288E0-7875-42C4-84C8-98DBBD3BF4D2}" type="datetimeFigureOut">
               <a:rPr lang="zh-CN" altLang="en-US" smtClean="0"/>
-              <a:t>2026/9/15</a:t>
+              <a:t>2026/9/16</a:t>
             </a:fld>
             <a:endParaRPr lang="zh-CN" altLang="en-US"/>
           </a:p>
@@ -2007,7 +2007,7 @@
           <a:p>
             <a:fld id="{82F288E0-7875-42C4-84C8-98DBBD3BF4D2}" type="datetimeFigureOut">
               <a:rPr lang="zh-CN" altLang="en-US" smtClean="0"/>
-              <a:t>2026/9/15</a:t>
+              <a:t>2026/9/16</a:t>
             </a:fld>
             <a:endParaRPr lang="zh-CN" altLang="en-US"/>
           </a:p>
@@ -2097,7 +2097,7 @@
           <a:p>
             <a:fld id="{82F288E0-7875-42C4-84C8-98DBBD3BF4D2}" type="datetimeFigureOut">
               <a:rPr lang="zh-CN" altLang="en-US" smtClean="0"/>
-              <a:t>2026/9/15</a:t>
+              <a:t>2026/9/16</a:t>
             </a:fld>
             <a:endParaRPr lang="zh-CN" altLang="en-US"/>
           </a:p>
@@ -2344,7 +2344,7 @@
           <a:p>
             <a:fld id="{82F288E0-7875-42C4-84C8-98DBBD3BF4D2}" type="datetimeFigureOut">
               <a:rPr lang="zh-CN" altLang="en-US" smtClean="0"/>
-              <a:t>2026/9/15</a:t>
+              <a:t>2026/9/16</a:t>
             </a:fld>
             <a:endParaRPr lang="zh-CN" altLang="en-US"/>
           </a:p>
@@ -2517,7 +2517,7 @@
           <a:p>
             <a:fld id="{82F288E0-7875-42C4-84C8-98DBBD3BF4D2}" type="datetimeFigureOut">
               <a:rPr lang="zh-CN" altLang="en-US" smtClean="0"/>
-              <a:t>2026/9/15</a:t>
+              <a:t>2026/9/16</a:t>
             </a:fld>
             <a:endParaRPr lang="zh-CN" altLang="en-US"/>
           </a:p>
@@ -2723,7 +2723,7 @@
           <a:p>
             <a:fld id="{82F288E0-7875-42C4-84C8-98DBBD3BF4D2}" type="datetimeFigureOut">
               <a:rPr lang="zh-CN" altLang="en-US" smtClean="0"/>
-              <a:t>2026/9/15</a:t>
+              <a:t>2026/9/16</a:t>
             </a:fld>
             <a:endParaRPr lang="zh-CN" altLang="en-US"/>
           </a:p>
@@ -3345,221 +3345,6 @@
           <a:p>
             <a:pPr algn="ctr"/>
             <a:endParaRPr lang="zh-CN" altLang="en-US"/>
-          </a:p>
-        </p:txBody>
-      </p:sp>
-      <p:sp>
-        <p:nvSpPr>
-          <p:cNvPr id="10" name="标题 3"/>
-          <p:cNvSpPr>
-            <a:spLocks noGrp="1"/>
-          </p:cNvSpPr>
-          <p:nvPr/>
-        </p:nvSpPr>
-        <p:spPr>
-          <a:xfrm>
-            <a:off x="0" y="1849755"/>
-            <a:ext cx="12192635" cy="3008630"/>
-          </a:xfrm>
-          <a:prstGeom prst="rect">
-            <a:avLst/>
-          </a:prstGeom>
-        </p:spPr>
-        <p:txBody>
-          <a:bodyPr vert="horz" lIns="91440" tIns="45720" rIns="91440" bIns="45720" rtlCol="0" anchor="ctr" anchorCtr="0">
-            <a:normAutofit/>
-          </a:bodyPr>
-          <a:lstStyle>
-            <a:lvl1pPr algn="ctr" defTabSz="914400" rtl="0" eaLnBrk="1" latinLnBrk="0" hangingPunct="1">
-              <a:lnSpc>
-                <a:spcPct val="90000"/>
-              </a:lnSpc>
-              <a:spcBef>
-                <a:spcPct val="0"/>
-              </a:spcBef>
-              <a:buNone/>
-              <a:defRPr sz="6000" b="1" kern="1200">
-                <a:solidFill>
-                  <a:sysClr val="window" lastClr="FFFFFF"/>
-                </a:solidFill>
-                <a:latin typeface="方正银联黑简体" panose="02000000000000000000" pitchFamily="2" charset="-122"/>
-                <a:ea typeface="方正银联黑简体" panose="02000000000000000000" pitchFamily="2" charset="-122"/>
-                <a:cs typeface="方正银联黑简体" panose="02000000000000000000" pitchFamily="2" charset="-122"/>
-              </a:defRPr>
-            </a:lvl1pPr>
-          </a:lstStyle>
-          <a:p>
-            <a:r>
-              <a:rPr lang="zh-CN" altLang="en-US" dirty="0">
-                <a:solidFill>
-                  <a:schemeClr val="accent2">
-                    <a:lumMod val="50000"/>
-                  </a:schemeClr>
-                </a:solidFill>
-              </a:rPr>
-              <a:t>课程名称</a:t>
-            </a:r>
-            <a:endParaRPr lang="zh-CN" altLang="en-US" sz="3600" dirty="0">
-              <a:solidFill>
-                <a:schemeClr val="accent2">
-                  <a:lumMod val="50000"/>
-                </a:schemeClr>
-              </a:solidFill>
-            </a:endParaRPr>
-          </a:p>
-        </p:txBody>
-      </p:sp>
-      <p:sp>
-        <p:nvSpPr>
-          <p:cNvPr id="11" name="文本框 10"/>
-          <p:cNvSpPr txBox="1"/>
-          <p:nvPr/>
-        </p:nvSpPr>
-        <p:spPr>
-          <a:xfrm>
-            <a:off x="4984432" y="5178091"/>
-            <a:ext cx="2077720" cy="906780"/>
-          </a:xfrm>
-          <a:prstGeom prst="rect">
-            <a:avLst/>
-          </a:prstGeom>
-          <a:noFill/>
-        </p:spPr>
-        <p:txBody>
-          <a:bodyPr wrap="none" rtlCol="0">
-            <a:spAutoFit/>
-          </a:bodyPr>
-          <a:lstStyle/>
-          <a:p>
-            <a:pPr algn="ctr">
-              <a:spcBef>
-                <a:spcPts val="600"/>
-              </a:spcBef>
-            </a:pPr>
-            <a:r>
-              <a:rPr lang="en-US" altLang="zh-CN" sz="2400" b="1" dirty="0">
-                <a:solidFill>
-                  <a:schemeClr val="accent2">
-                    <a:lumMod val="50000"/>
-                  </a:schemeClr>
-                </a:solidFill>
-                <a:latin typeface="方正银联黑简体" panose="02000000000000000000" pitchFamily="2" charset="-122"/>
-                <a:ea typeface="方正银联黑简体" panose="02000000000000000000" pitchFamily="2" charset="-122"/>
-                <a:cs typeface="方正银联黑简体" panose="02000000000000000000" pitchFamily="2" charset="-122"/>
-              </a:rPr>
-              <a:t>XX</a:t>
-            </a:r>
-            <a:r>
-              <a:rPr lang="zh-CN" altLang="en-US" sz="2400" b="1" dirty="0">
-                <a:solidFill>
-                  <a:schemeClr val="accent2">
-                    <a:lumMod val="50000"/>
-                  </a:schemeClr>
-                </a:solidFill>
-                <a:latin typeface="方正银联黑简体" panose="02000000000000000000" pitchFamily="2" charset="-122"/>
-                <a:ea typeface="方正银联黑简体" panose="02000000000000000000" pitchFamily="2" charset="-122"/>
-                <a:cs typeface="方正银联黑简体" panose="02000000000000000000" pitchFamily="2" charset="-122"/>
-              </a:rPr>
-              <a:t>团队   </a:t>
-            </a:r>
-            <a:r>
-              <a:rPr lang="en-US" altLang="zh-CN" sz="2400" b="1" dirty="0">
-                <a:solidFill>
-                  <a:schemeClr val="accent2">
-                    <a:lumMod val="50000"/>
-                  </a:schemeClr>
-                </a:solidFill>
-                <a:latin typeface="方正银联黑简体" panose="02000000000000000000" pitchFamily="2" charset="-122"/>
-                <a:ea typeface="方正银联黑简体" panose="02000000000000000000" pitchFamily="2" charset="-122"/>
-                <a:cs typeface="方正银联黑简体" panose="02000000000000000000" pitchFamily="2" charset="-122"/>
-              </a:rPr>
-              <a:t>XXX</a:t>
-            </a:r>
-          </a:p>
-          <a:p>
-            <a:pPr algn="ctr">
-              <a:spcBef>
-                <a:spcPts val="600"/>
-              </a:spcBef>
-            </a:pPr>
-            <a:r>
-              <a:rPr lang="en-US" altLang="zh-CN" sz="2400" b="1" dirty="0">
-                <a:solidFill>
-                  <a:schemeClr val="accent2">
-                    <a:lumMod val="50000"/>
-                  </a:schemeClr>
-                </a:solidFill>
-                <a:latin typeface="方正银联黑简体" panose="02000000000000000000" pitchFamily="2" charset="-122"/>
-                <a:ea typeface="方正银联黑简体" panose="02000000000000000000" pitchFamily="2" charset="-122"/>
-                <a:cs typeface="方正银联黑简体" panose="02000000000000000000" pitchFamily="2" charset="-122"/>
-              </a:rPr>
-              <a:t>X</a:t>
-            </a:r>
-            <a:r>
-              <a:rPr lang="zh-CN" altLang="en-US" sz="2400" b="1" dirty="0">
-                <a:solidFill>
-                  <a:schemeClr val="accent2">
-                    <a:lumMod val="50000"/>
-                  </a:schemeClr>
-                </a:solidFill>
-                <a:latin typeface="方正银联黑简体" panose="02000000000000000000" pitchFamily="2" charset="-122"/>
-                <a:ea typeface="方正银联黑简体" panose="02000000000000000000" pitchFamily="2" charset="-122"/>
-                <a:cs typeface="方正银联黑简体" panose="02000000000000000000" pitchFamily="2" charset="-122"/>
-              </a:rPr>
-              <a:t>年</a:t>
-            </a:r>
-            <a:r>
-              <a:rPr lang="en-US" altLang="zh-CN" sz="2400" b="1" dirty="0">
-                <a:solidFill>
-                  <a:schemeClr val="accent2">
-                    <a:lumMod val="50000"/>
-                  </a:schemeClr>
-                </a:solidFill>
-                <a:latin typeface="方正银联黑简体" panose="02000000000000000000" pitchFamily="2" charset="-122"/>
-                <a:ea typeface="方正银联黑简体" panose="02000000000000000000" pitchFamily="2" charset="-122"/>
-                <a:cs typeface="方正银联黑简体" panose="02000000000000000000" pitchFamily="2" charset="-122"/>
-              </a:rPr>
-              <a:t>X</a:t>
-            </a:r>
-            <a:r>
-              <a:rPr lang="zh-CN" altLang="en-US" sz="2400" b="1" dirty="0">
-                <a:solidFill>
-                  <a:schemeClr val="accent2">
-                    <a:lumMod val="50000"/>
-                  </a:schemeClr>
-                </a:solidFill>
-                <a:latin typeface="方正银联黑简体" panose="02000000000000000000" pitchFamily="2" charset="-122"/>
-                <a:ea typeface="方正银联黑简体" panose="02000000000000000000" pitchFamily="2" charset="-122"/>
-                <a:cs typeface="方正银联黑简体" panose="02000000000000000000" pitchFamily="2" charset="-122"/>
-              </a:rPr>
-              <a:t>月</a:t>
-            </a:r>
-            <a:r>
-              <a:rPr lang="en-US" altLang="zh-CN" sz="2400" b="1" dirty="0">
-                <a:solidFill>
-                  <a:schemeClr val="accent2">
-                    <a:lumMod val="50000"/>
-                  </a:schemeClr>
-                </a:solidFill>
-                <a:latin typeface="方正银联黑简体" panose="02000000000000000000" pitchFamily="2" charset="-122"/>
-                <a:ea typeface="方正银联黑简体" panose="02000000000000000000" pitchFamily="2" charset="-122"/>
-                <a:cs typeface="方正银联黑简体" panose="02000000000000000000" pitchFamily="2" charset="-122"/>
-              </a:rPr>
-              <a:t>X</a:t>
-            </a:r>
-            <a:r>
-              <a:rPr lang="zh-CN" altLang="en-US" sz="2400" b="1" dirty="0">
-                <a:solidFill>
-                  <a:schemeClr val="accent2">
-                    <a:lumMod val="50000"/>
-                  </a:schemeClr>
-                </a:solidFill>
-                <a:latin typeface="方正银联黑简体" panose="02000000000000000000" pitchFamily="2" charset="-122"/>
-                <a:ea typeface="方正银联黑简体" panose="02000000000000000000" pitchFamily="2" charset="-122"/>
-                <a:cs typeface="方正银联黑简体" panose="02000000000000000000" pitchFamily="2" charset="-122"/>
-              </a:rPr>
-              <a:t>日</a:t>
-            </a:r>
           </a:p>
         </p:txBody>
       </p:sp>
